--- a/classes/parte-12-osint-e-ingenieria-social/249-fundamentos-de-osint/clase-249-presentacion.pptx
+++ b/classes/parte-12-osint-e-ingenieria-social/249-fundamentos-de-osint/clase-249-presentacion.pptx
@@ -17,6 +17,10 @@
     <p:sldId id="265" r:id="rId16"/>
     <p:sldId id="266" r:id="rId17"/>
     <p:sldId id="267" r:id="rId18"/>
+    <p:sldId id="268" r:id="rId19"/>
+    <p:sldId id="269" r:id="rId20"/>
+    <p:sldId id="270" r:id="rId21"/>
+    <p:sldId id="271" r:id="rId22"/>
   </p:sldIdLst>
   <p:sldSz cx="9144000" cy="6858000" type="screen4x3"/>
   <p:notesSz cx="6858000" cy="9144000"/>
@@ -3198,7 +3202,7 @@
                   <a:srgbClr val="0B3D2E"/>
                 </a:solidFill>
               </a:rPr>
-              <a:t>⚠️ Errores comunes</a:t>
+              <a:t>🧪 Laboratorio guiado</a:t>
             </a:r>
           </a:p>
         </p:txBody>
@@ -3236,67 +3240,97 @@
                   <a:srgbClr val="22282E"/>
                 </a:solidFill>
               </a:rPr>
-              <a:t>•  El objetivo detecta la investigación — Se hizo OSINT activo sin querer (visitar su web logueado). Usa fuentes pasivas y sock puppets.</a:t>
-            </a:r>
-          </a:p>
-          <a:p>
-            <a:pPr>
-              <a:spcAft>
-                <a:spcPts val="600"/>
-              </a:spcAft>
-            </a:pPr>
-            <a:r>
-              <a:rPr sz="1500">
-                <a:solidFill>
-                  <a:srgbClr val="22282E"/>
-                </a:solidFill>
-              </a:rPr>
-              <a:t>•  Hallazgos que no se pueden reproducir — Faltó cadena de custodia. Registra URL, fecha y captura de cada dato.</a:t>
-            </a:r>
-          </a:p>
-          <a:p>
-            <a:pPr>
-              <a:spcAft>
-                <a:spcPts val="600"/>
-              </a:spcAft>
-            </a:pPr>
-            <a:r>
-              <a:rPr sz="1500">
-                <a:solidFill>
-                  <a:srgbClr val="22282E"/>
-                </a:solidFill>
-              </a:rPr>
-              <a:t>•  Conclusiones sesgadas — Se buscó confirmar una hipótesis. Formula hipótesis rivales y busca refutarlas.</a:t>
-            </a:r>
-          </a:p>
-          <a:p>
-            <a:pPr>
-              <a:spcAft>
-                <a:spcPts val="600"/>
-              </a:spcAft>
-            </a:pPr>
-            <a:r>
-              <a:rPr sz="1500">
-                <a:solidFill>
-                  <a:srgbClr val="22282E"/>
-                </a:solidFill>
-              </a:rPr>
-              <a:t>•  Cuenta personal filtrada al objetivo — Se usó el navegador/sesión propios. Investiga siempre desde la VM aislada.</a:t>
-            </a:r>
-          </a:p>
-          <a:p>
-            <a:pPr>
-              <a:spcAft>
-                <a:spcPts val="600"/>
-              </a:spcAft>
-            </a:pPr>
-            <a:r>
-              <a:rPr sz="1500">
-                <a:solidFill>
-                  <a:srgbClr val="22282E"/>
-                </a:solidFill>
-              </a:rPr>
-              <a:t>•  Datos "públicos" pero de origen ilegal — Un leak robado no es fuente lícita. Verifica la legalidad de la fuente.</a:t>
+              <a:t>•  Ejercicio aplicado y autorizado: OSINT sobre ti mismo (autoevaluación de huella).</a:t>
+            </a:r>
+          </a:p>
+          <a:p>
+            <a:pPr>
+              <a:spcAft>
+                <a:spcPts val="600"/>
+              </a:spcAft>
+            </a:pPr>
+            <a:r>
+              <a:rPr sz="1500">
+                <a:solidFill>
+                  <a:srgbClr val="22282E"/>
+                </a:solidFill>
+              </a:rPr>
+              <a:t>•  Crea un snapshot limpio de tu VM de investigación y anota fecha/hora de inicio del caso.</a:t>
+            </a:r>
+          </a:p>
+          <a:p>
+            <a:pPr>
+              <a:spcAft>
+                <a:spcPts val="600"/>
+              </a:spcAft>
+            </a:pPr>
+            <a:r>
+              <a:rPr sz="1500">
+                <a:solidFill>
+                  <a:srgbClr val="22282E"/>
+                </a:solidFill>
+              </a:rPr>
+              <a:t>•  Define la dirección: escribe la pregunta de inteligencia (ej.: "¿qué datos míos son públicos y podrían usarse en un pretexto contra mí?").</a:t>
+            </a:r>
+          </a:p>
+          <a:p>
+            <a:pPr>
+              <a:spcAft>
+                <a:spcPts val="600"/>
+              </a:spcAft>
+            </a:pPr>
+            <a:r>
+              <a:rPr sz="1500">
+                <a:solidFill>
+                  <a:srgbClr val="22282E"/>
+                </a:solidFill>
+              </a:rPr>
+              <a:t>•  Recolección pasiva: busca tu nombre entre comillas en varios buscadores (Google, Bing, DuckDuckGo) y en https://www.google.com/search?q="Tu Nombre". Registra cada URL y captura.</a:t>
+            </a:r>
+          </a:p>
+          <a:p>
+            <a:pPr>
+              <a:spcAft>
+                <a:spcPts val="600"/>
+              </a:spcAft>
+            </a:pPr>
+            <a:r>
+              <a:rPr sz="1500">
+                <a:solidFill>
+                  <a:srgbClr val="22282E"/>
+                </a:solidFill>
+              </a:rPr>
+              <a:t>•  Consulta motores especializados: https://haveibeenpwned.com/ para brechas asociadas a tu correo.</a:t>
+            </a:r>
+          </a:p>
+          <a:p>
+            <a:pPr>
+              <a:spcAft>
+                <a:spcPts val="600"/>
+              </a:spcAft>
+            </a:pPr>
+            <a:r>
+              <a:rPr sz="1500">
+                <a:solidFill>
+                  <a:srgbClr val="22282E"/>
+                </a:solidFill>
+              </a:rPr>
+              <a:t>•  Revisa metadatos de una foto tuya pública con exiftool foto.jpg y anota qué revela.</a:t>
+            </a:r>
+          </a:p>
+          <a:p>
+            <a:pPr>
+              <a:spcAft>
+                <a:spcPts val="600"/>
+              </a:spcAft>
+            </a:pPr>
+            <a:r>
+              <a:rPr sz="1500">
+                <a:solidFill>
+                  <a:srgbClr val="22282E"/>
+                </a:solidFill>
+              </a:rPr>
+              <a:t>•  Procesamiento: vuelca los datos en una tabla (dato, fuente, fecha, confianza alta/media/baja).</a:t>
             </a:r>
           </a:p>
         </p:txBody>
@@ -3347,7 +3381,7 @@
                   <a:srgbClr val="0B3D2E"/>
                 </a:solidFill>
               </a:rPr>
-              <a:t>❓ Preguntas frecuentes</a:t>
+              <a:t>✍️ Ejercicios</a:t>
             </a:r>
           </a:p>
         </p:txBody>
@@ -3385,97 +3419,82 @@
                   <a:srgbClr val="22282E"/>
                 </a:solidFill>
               </a:rPr>
-              <a:t>•  ❓ ¿OSINT es legal?</a:t>
-            </a:r>
-          </a:p>
-          <a:p>
-            <a:pPr>
-              <a:spcAft>
-                <a:spcPts val="600"/>
-              </a:spcAft>
-            </a:pPr>
-            <a:r>
-              <a:rPr sz="1500">
-                <a:solidFill>
-                  <a:srgbClr val="22282E"/>
-                </a:solidFill>
-              </a:rPr>
-              <a:t>•  Recolectar información genuinamente pública suele serlo, pero el uso, el almacenamiento de datos</a:t>
-            </a:r>
-          </a:p>
-          <a:p>
-            <a:pPr>
-              <a:spcAft>
-                <a:spcPts val="600"/>
-              </a:spcAft>
-            </a:pPr>
-            <a:r>
-              <a:rPr sz="1500">
-                <a:solidFill>
-                  <a:srgbClr val="22282E"/>
-                </a:solidFill>
-              </a:rPr>
-              <a:t>•  personales y la interacción con el objetivo tienen límites (GDPR, leyes locales). El contexto y el</a:t>
-            </a:r>
-          </a:p>
-          <a:p>
-            <a:pPr>
-              <a:spcAft>
-                <a:spcPts val="600"/>
-              </a:spcAft>
-            </a:pPr>
-            <a:r>
-              <a:rPr sz="1500">
-                <a:solidFill>
-                  <a:srgbClr val="22282E"/>
-                </a:solidFill>
-              </a:rPr>
-              <a:t>•  propósito determinan la legalidad.</a:t>
-            </a:r>
-          </a:p>
-          <a:p>
-            <a:pPr>
-              <a:spcAft>
-                <a:spcPts val="600"/>
-              </a:spcAft>
-            </a:pPr>
-            <a:r>
-              <a:rPr sz="1500">
-                <a:solidFill>
-                  <a:srgbClr val="22282E"/>
-                </a:solidFill>
-              </a:rPr>
-              <a:t>•  ❓ ¿Necesito Tor o VPN siempre?</a:t>
-            </a:r>
-          </a:p>
-          <a:p>
-            <a:pPr>
-              <a:spcAft>
-                <a:spcPts val="600"/>
-              </a:spcAft>
-            </a:pPr>
-            <a:r>
-              <a:rPr sz="1500">
-                <a:solidFill>
-                  <a:srgbClr val="22282E"/>
-                </a:solidFill>
-              </a:rPr>
-              <a:t>•  No siempre; depende del alcance y del riesgo de atribución. Para investigaciones sensibles, sí. Lo</a:t>
-            </a:r>
-          </a:p>
-          <a:p>
-            <a:pPr>
-              <a:spcAft>
-                <a:spcPts val="600"/>
-              </a:spcAft>
-            </a:pPr>
-            <a:r>
-              <a:rPr sz="1500">
-                <a:solidFill>
-                  <a:srgbClr val="22282E"/>
-                </a:solidFill>
-              </a:rPr>
-              <a:t>•  esencial es no exponer tu identidad real ni tocar la infraestructura del objetivo sin querer.</a:t>
+              <a:t>•  Clasifica 10 fuentes de datos como pasivas o activas y justifica cada una.</a:t>
+            </a:r>
+          </a:p>
+          <a:p>
+            <a:pPr>
+              <a:spcAft>
+                <a:spcPts val="600"/>
+              </a:spcAft>
+            </a:pPr>
+            <a:r>
+              <a:rPr sz="1500">
+                <a:solidFill>
+                  <a:srgbClr val="22282E"/>
+                </a:solidFill>
+              </a:rPr>
+              <a:t>•  Dibuja el ciclo de inteligencia y describe qué ocurre si se salta la fase de "dirección".</a:t>
+            </a:r>
+          </a:p>
+          <a:p>
+            <a:pPr>
+              <a:spcAft>
+                <a:spcPts val="600"/>
+              </a:spcAft>
+            </a:pPr>
+            <a:r>
+              <a:rPr sz="1500">
+                <a:solidFill>
+                  <a:srgbClr val="22282E"/>
+                </a:solidFill>
+              </a:rPr>
+              <a:t>•  Diseña en papel una política para identidades de investigación: aprobación, propósito, plataformas permitidas, prohibición de suplantar personas reales, retención y cierre. No crees ni uses una…</a:t>
+            </a:r>
+          </a:p>
+          <a:p>
+            <a:pPr>
+              <a:spcAft>
+                <a:spcPts val="600"/>
+              </a:spcAft>
+            </a:pPr>
+            <a:r>
+              <a:rPr sz="1500">
+                <a:solidFill>
+                  <a:srgbClr val="22282E"/>
+                </a:solidFill>
+              </a:rPr>
+              <a:t>•  Redacta una hipótesis y luego lista 3 datos que la refutarían, para combatir el sesgo de confirmación.</a:t>
+            </a:r>
+          </a:p>
+          <a:p>
+            <a:pPr>
+              <a:spcAft>
+                <a:spcPts val="600"/>
+              </a:spcAft>
+            </a:pPr>
+            <a:r>
+              <a:rPr sz="1500">
+                <a:solidFill>
+                  <a:srgbClr val="22282E"/>
+                </a:solidFill>
+              </a:rPr>
+              <a:t>•  Diseña la plantilla de tabla de hallazgos con columnas de confianza y verificación cruzada.</a:t>
+            </a:r>
+          </a:p>
+          <a:p>
+            <a:pPr>
+              <a:spcAft>
+                <a:spcPts val="600"/>
+              </a:spcAft>
+            </a:pPr>
+            <a:r>
+              <a:rPr sz="1500">
+                <a:solidFill>
+                  <a:srgbClr val="22282E"/>
+                </a:solidFill>
+              </a:rPr>
+              <a:t>•  Investiga la diferencia entre OSINT y "doxing" y explica dónde está la frontera legal/ética.</a:t>
             </a:r>
           </a:p>
         </p:txBody>
@@ -3526,7 +3545,7 @@
                   <a:srgbClr val="0B3D2E"/>
                 </a:solidFill>
               </a:rPr>
-              <a:t>🔗 Referencias</a:t>
+              <a:t>📝 Reto verificable</a:t>
             </a:r>
           </a:p>
         </p:txBody>
@@ -3564,6 +3583,483 @@
                   <a:srgbClr val="22282E"/>
                 </a:solidFill>
               </a:rPr>
+              <a:t>•  Produce un informe OSINT de tu propia huella (máx. 2 páginas) que incluya: pregunta de</a:t>
+            </a:r>
+          </a:p>
+          <a:p>
+            <a:pPr>
+              <a:spcAft>
+                <a:spcPts val="600"/>
+              </a:spcAft>
+            </a:pPr>
+            <a:r>
+              <a:rPr sz="1500">
+                <a:solidFill>
+                  <a:srgbClr val="22282E"/>
+                </a:solidFill>
+              </a:rPr>
+              <a:t>•  inteligencia, al menos 8 hallazgos con fuente y nivel de confianza, un diagrama de correlación y 5</a:t>
+            </a:r>
+          </a:p>
+          <a:p>
+            <a:pPr>
+              <a:spcAft>
+                <a:spcPts val="600"/>
+              </a:spcAft>
+            </a:pPr>
+            <a:r>
+              <a:rPr sz="1500">
+                <a:solidFill>
+                  <a:srgbClr val="22282E"/>
+                </a:solidFill>
+              </a:rPr>
+              <a:t>•  recomendaciones concretas de reducción de exposición.</a:t>
+            </a:r>
+          </a:p>
+          <a:p>
+            <a:pPr>
+              <a:spcAft>
+                <a:spcPts val="600"/>
+              </a:spcAft>
+            </a:pPr>
+            <a:r>
+              <a:rPr sz="1500">
+                <a:solidFill>
+                  <a:srgbClr val="22282E"/>
+                </a:solidFill>
+              </a:rPr>
+              <a:t>•  Criterio de aceptación: cada hallazgo es reproducible por un tercero siguiendo la fuente citada,</a:t>
+            </a:r>
+          </a:p>
+          <a:p>
+            <a:pPr>
+              <a:spcAft>
+                <a:spcPts val="600"/>
+              </a:spcAft>
+            </a:pPr>
+            <a:r>
+              <a:rPr sz="1500">
+                <a:solidFill>
+                  <a:srgbClr val="22282E"/>
+                </a:solidFill>
+              </a:rPr>
+              <a:t>•  y el informe distingue explícitamente hechos verificados de inferencias.</a:t>
+            </a:r>
+          </a:p>
+        </p:txBody>
+      </p:sp>
+    </p:spTree>
+  </p:cSld>
+  <p:clrMapOvr>
+    <a:masterClrMapping/>
+  </p:clrMapOvr>
+</p:sld>
+</file>
+
+<file path=ppt/slides/slide13.xml><?xml version="1.0" encoding="utf-8"?>
+<p:sld xmlns:a="http://schemas.openxmlformats.org/drawingml/2006/main" xmlns:p="http://schemas.openxmlformats.org/presentationml/2006/main" xmlns:r="http://schemas.openxmlformats.org/officeDocument/2006/relationships">
+  <p:cSld>
+    <p:spTree>
+      <p:nvGrpSpPr>
+        <p:cNvPr id="1" name=""/>
+        <p:cNvGrpSpPr/>
+        <p:nvPr/>
+      </p:nvGrpSpPr>
+      <p:grpSpPr/>
+      <p:sp>
+        <p:nvSpPr>
+          <p:cNvPr id="2" name="TextBox 1"/>
+          <p:cNvSpPr txBox="1"/>
+          <p:nvPr/>
+        </p:nvSpPr>
+        <p:spPr>
+          <a:xfrm>
+            <a:off x="457200" y="320040"/>
+            <a:ext cx="8229600" cy="822960"/>
+          </a:xfrm>
+          <a:prstGeom prst="rect">
+            <a:avLst/>
+          </a:prstGeom>
+          <a:noFill/>
+        </p:spPr>
+        <p:txBody>
+          <a:bodyPr wrap="square">
+            <a:spAutoFit/>
+          </a:bodyPr>
+          <a:lstStyle/>
+          <a:p>
+            <a:r>
+              <a:rPr sz="2600" b="1">
+                <a:solidFill>
+                  <a:srgbClr val="0B3D2E"/>
+                </a:solidFill>
+              </a:rPr>
+              <a:t>⚠️ Errores comunes</a:t>
+            </a:r>
+          </a:p>
+        </p:txBody>
+      </p:sp>
+      <p:sp>
+        <p:nvSpPr>
+          <p:cNvPr id="3" name="TextBox 2"/>
+          <p:cNvSpPr txBox="1"/>
+          <p:nvPr/>
+        </p:nvSpPr>
+        <p:spPr>
+          <a:xfrm>
+            <a:off x="457200" y="1280160"/>
+            <a:ext cx="8229600" cy="4937760"/>
+          </a:xfrm>
+          <a:prstGeom prst="rect">
+            <a:avLst/>
+          </a:prstGeom>
+          <a:noFill/>
+        </p:spPr>
+        <p:txBody>
+          <a:bodyPr wrap="square">
+            <a:spAutoFit/>
+          </a:bodyPr>
+          <a:lstStyle/>
+          <a:p>
+            <a:pPr>
+              <a:spcAft>
+                <a:spcPts val="600"/>
+              </a:spcAft>
+            </a:pPr>
+            <a:r>
+              <a:rPr sz="1500">
+                <a:solidFill>
+                  <a:srgbClr val="22282E"/>
+                </a:solidFill>
+              </a:rPr>
+              <a:t>•  El objetivo detecta la investigación — Se hizo interacción directa sin contemplarla. Revisa alcance, fuentes y entorno; no crees identidades encubiertas sin aprobación.</a:t>
+            </a:r>
+          </a:p>
+          <a:p>
+            <a:pPr>
+              <a:spcAft>
+                <a:spcPts val="600"/>
+              </a:spcAft>
+            </a:pPr>
+            <a:r>
+              <a:rPr sz="1500">
+                <a:solidFill>
+                  <a:srgbClr val="22282E"/>
+                </a:solidFill>
+              </a:rPr>
+              <a:t>•  Hallazgos que no se pueden reproducir — Faltó procedencia. Registra URL, fecha, contexto y copia permitida de cada dato.</a:t>
+            </a:r>
+          </a:p>
+          <a:p>
+            <a:pPr>
+              <a:spcAft>
+                <a:spcPts val="600"/>
+              </a:spcAft>
+            </a:pPr>
+            <a:r>
+              <a:rPr sz="1500">
+                <a:solidFill>
+                  <a:srgbClr val="22282E"/>
+                </a:solidFill>
+              </a:rPr>
+              <a:t>•  Conclusiones sesgadas — Se buscó confirmar una hipótesis. Formula hipótesis rivales y busca refutarlas.</a:t>
+            </a:r>
+          </a:p>
+          <a:p>
+            <a:pPr>
+              <a:spcAft>
+                <a:spcPts val="600"/>
+              </a:spcAft>
+            </a:pPr>
+            <a:r>
+              <a:rPr sz="1500">
+                <a:solidFill>
+                  <a:srgbClr val="22282E"/>
+                </a:solidFill>
+              </a:rPr>
+              <a:t>•  Cuenta personal filtrada al objetivo — Se usó el navegador/sesión propios. Investiga siempre desde la VM aislada.</a:t>
+            </a:r>
+          </a:p>
+          <a:p>
+            <a:pPr>
+              <a:spcAft>
+                <a:spcPts val="600"/>
+              </a:spcAft>
+            </a:pPr>
+            <a:r>
+              <a:rPr sz="1500">
+                <a:solidFill>
+                  <a:srgbClr val="22282E"/>
+                </a:solidFill>
+              </a:rPr>
+              <a:t>•  Datos "públicos" pero de origen ilegal — Un leak robado no es fuente lícita. Verifica la legalidad de la fuente.</a:t>
+            </a:r>
+          </a:p>
+        </p:txBody>
+      </p:sp>
+    </p:spTree>
+  </p:cSld>
+  <p:clrMapOvr>
+    <a:masterClrMapping/>
+  </p:clrMapOvr>
+</p:sld>
+</file>
+
+<file path=ppt/slides/slide14.xml><?xml version="1.0" encoding="utf-8"?>
+<p:sld xmlns:a="http://schemas.openxmlformats.org/drawingml/2006/main" xmlns:p="http://schemas.openxmlformats.org/presentationml/2006/main" xmlns:r="http://schemas.openxmlformats.org/officeDocument/2006/relationships">
+  <p:cSld>
+    <p:spTree>
+      <p:nvGrpSpPr>
+        <p:cNvPr id="1" name=""/>
+        <p:cNvGrpSpPr/>
+        <p:nvPr/>
+      </p:nvGrpSpPr>
+      <p:grpSpPr/>
+      <p:sp>
+        <p:nvSpPr>
+          <p:cNvPr id="2" name="TextBox 1"/>
+          <p:cNvSpPr txBox="1"/>
+          <p:nvPr/>
+        </p:nvSpPr>
+        <p:spPr>
+          <a:xfrm>
+            <a:off x="457200" y="320040"/>
+            <a:ext cx="8229600" cy="822960"/>
+          </a:xfrm>
+          <a:prstGeom prst="rect">
+            <a:avLst/>
+          </a:prstGeom>
+          <a:noFill/>
+        </p:spPr>
+        <p:txBody>
+          <a:bodyPr wrap="square">
+            <a:spAutoFit/>
+          </a:bodyPr>
+          <a:lstStyle/>
+          <a:p>
+            <a:r>
+              <a:rPr sz="2600" b="1">
+                <a:solidFill>
+                  <a:srgbClr val="0B3D2E"/>
+                </a:solidFill>
+              </a:rPr>
+              <a:t>❓ Preguntas frecuentes</a:t>
+            </a:r>
+          </a:p>
+        </p:txBody>
+      </p:sp>
+      <p:sp>
+        <p:nvSpPr>
+          <p:cNvPr id="3" name="TextBox 2"/>
+          <p:cNvSpPr txBox="1"/>
+          <p:nvPr/>
+        </p:nvSpPr>
+        <p:spPr>
+          <a:xfrm>
+            <a:off x="457200" y="1280160"/>
+            <a:ext cx="8229600" cy="4937760"/>
+          </a:xfrm>
+          <a:prstGeom prst="rect">
+            <a:avLst/>
+          </a:prstGeom>
+          <a:noFill/>
+        </p:spPr>
+        <p:txBody>
+          <a:bodyPr wrap="square">
+            <a:spAutoFit/>
+          </a:bodyPr>
+          <a:lstStyle/>
+          <a:p>
+            <a:pPr>
+              <a:spcAft>
+                <a:spcPts val="600"/>
+              </a:spcAft>
+            </a:pPr>
+            <a:r>
+              <a:rPr sz="1500">
+                <a:solidFill>
+                  <a:srgbClr val="22282E"/>
+                </a:solidFill>
+              </a:rPr>
+              <a:t>•  ❓ ¿OSINT es legal?</a:t>
+            </a:r>
+          </a:p>
+          <a:p>
+            <a:pPr>
+              <a:spcAft>
+                <a:spcPts val="600"/>
+              </a:spcAft>
+            </a:pPr>
+            <a:r>
+              <a:rPr sz="1500">
+                <a:solidFill>
+                  <a:srgbClr val="22282E"/>
+                </a:solidFill>
+              </a:rPr>
+              <a:t>•  Recolectar información genuinamente pública suele serlo, pero el uso, el almacenamiento de datos</a:t>
+            </a:r>
+          </a:p>
+          <a:p>
+            <a:pPr>
+              <a:spcAft>
+                <a:spcPts val="600"/>
+              </a:spcAft>
+            </a:pPr>
+            <a:r>
+              <a:rPr sz="1500">
+                <a:solidFill>
+                  <a:srgbClr val="22282E"/>
+                </a:solidFill>
+              </a:rPr>
+              <a:t>•  personales y la interacción con el objetivo tienen límites (GDPR, leyes locales). El contexto y el</a:t>
+            </a:r>
+          </a:p>
+          <a:p>
+            <a:pPr>
+              <a:spcAft>
+                <a:spcPts val="600"/>
+              </a:spcAft>
+            </a:pPr>
+            <a:r>
+              <a:rPr sz="1500">
+                <a:solidFill>
+                  <a:srgbClr val="22282E"/>
+                </a:solidFill>
+              </a:rPr>
+              <a:t>•  propósito determinan la legalidad.</a:t>
+            </a:r>
+          </a:p>
+          <a:p>
+            <a:pPr>
+              <a:spcAft>
+                <a:spcPts val="600"/>
+              </a:spcAft>
+            </a:pPr>
+            <a:r>
+              <a:rPr sz="1500">
+                <a:solidFill>
+                  <a:srgbClr val="22282E"/>
+                </a:solidFill>
+              </a:rPr>
+              <a:t>•  ❓ ¿Necesito Tor o VPN siempre?</a:t>
+            </a:r>
+          </a:p>
+          <a:p>
+            <a:pPr>
+              <a:spcAft>
+                <a:spcPts val="600"/>
+              </a:spcAft>
+            </a:pPr>
+            <a:r>
+              <a:rPr sz="1500">
+                <a:solidFill>
+                  <a:srgbClr val="22282E"/>
+                </a:solidFill>
+              </a:rPr>
+              <a:t>•  No existe una respuesta universal. Depende del adversario, la legislación, las reglas de la organización y las fuentes consultadas. Tor o una VPN cambian qué partes observan el tráfico, pero también…</a:t>
+            </a:r>
+          </a:p>
+          <a:p>
+            <a:pPr>
+              <a:spcAft>
+                <a:spcPts val="600"/>
+              </a:spcAft>
+            </a:pPr>
+            <a:r>
+              <a:rPr sz="1500">
+                <a:solidFill>
+                  <a:srgbClr val="22282E"/>
+                </a:solidFill>
+              </a:rPr>
+              <a:t>•  ❓ ¿Un sock puppet es engañar?</a:t>
+            </a:r>
+          </a:p>
+        </p:txBody>
+      </p:sp>
+    </p:spTree>
+  </p:cSld>
+  <p:clrMapOvr>
+    <a:masterClrMapping/>
+  </p:clrMapOvr>
+</p:sld>
+</file>
+
+<file path=ppt/slides/slide15.xml><?xml version="1.0" encoding="utf-8"?>
+<p:sld xmlns:a="http://schemas.openxmlformats.org/drawingml/2006/main" xmlns:p="http://schemas.openxmlformats.org/presentationml/2006/main" xmlns:r="http://schemas.openxmlformats.org/officeDocument/2006/relationships">
+  <p:cSld>
+    <p:spTree>
+      <p:nvGrpSpPr>
+        <p:cNvPr id="1" name=""/>
+        <p:cNvGrpSpPr/>
+        <p:nvPr/>
+      </p:nvGrpSpPr>
+      <p:grpSpPr/>
+      <p:sp>
+        <p:nvSpPr>
+          <p:cNvPr id="2" name="TextBox 1"/>
+          <p:cNvSpPr txBox="1"/>
+          <p:nvPr/>
+        </p:nvSpPr>
+        <p:spPr>
+          <a:xfrm>
+            <a:off x="457200" y="320040"/>
+            <a:ext cx="8229600" cy="822960"/>
+          </a:xfrm>
+          <a:prstGeom prst="rect">
+            <a:avLst/>
+          </a:prstGeom>
+          <a:noFill/>
+        </p:spPr>
+        <p:txBody>
+          <a:bodyPr wrap="square">
+            <a:spAutoFit/>
+          </a:bodyPr>
+          <a:lstStyle/>
+          <a:p>
+            <a:r>
+              <a:rPr sz="2600" b="1">
+                <a:solidFill>
+                  <a:srgbClr val="0B3D2E"/>
+                </a:solidFill>
+              </a:rPr>
+              <a:t>🔗 Referencias</a:t>
+            </a:r>
+          </a:p>
+        </p:txBody>
+      </p:sp>
+      <p:sp>
+        <p:nvSpPr>
+          <p:cNvPr id="3" name="TextBox 2"/>
+          <p:cNvSpPr txBox="1"/>
+          <p:nvPr/>
+        </p:nvSpPr>
+        <p:spPr>
+          <a:xfrm>
+            <a:off x="457200" y="1280160"/>
+            <a:ext cx="8229600" cy="4937760"/>
+          </a:xfrm>
+          <a:prstGeom prst="rect">
+            <a:avLst/>
+          </a:prstGeom>
+          <a:noFill/>
+        </p:spPr>
+        <p:txBody>
+          <a:bodyPr wrap="square">
+            <a:spAutoFit/>
+          </a:bodyPr>
+          <a:lstStyle/>
+          <a:p>
+            <a:pPr>
+              <a:spcAft>
+                <a:spcPts val="600"/>
+              </a:spcAft>
+            </a:pPr>
+            <a:r>
+              <a:rPr sz="1500">
+                <a:solidFill>
+                  <a:srgbClr val="22282E"/>
+                </a:solidFill>
+              </a:rPr>
               <a:t>•  Bazzell, M. Open Source Intelligence Techniques. &lt;https://inteltechniques.com/book1.html&gt;</a:t>
             </a:r>
           </a:p>
@@ -3627,8 +4123,98 @@
               <a:t>•  Have I Been Pwned. &lt;https://haveibeenpwned.com/&gt;</a:t>
             </a:r>
           </a:p>
-        </p:txBody>
-      </p:sp>
+          <a:p>
+            <a:pPr>
+              <a:spcAft>
+                <a:spcPts val="600"/>
+              </a:spcAft>
+            </a:pPr>
+            <a:r>
+              <a:rPr sz="1500">
+                <a:solidFill>
+                  <a:srgbClr val="22282E"/>
+                </a:solidFill>
+              </a:rPr>
+              <a:t>•  OHCHR y UC Berkeley — Berkeley Protocol on Digital Open Source Investigations. &lt;https://www.ohchr.org/sites/default/files/2022-04/OHCHRBerkeleyProtocol.pdf&gt;</a:t>
+            </a:r>
+          </a:p>
+        </p:txBody>
+      </p:sp>
+    </p:spTree>
+  </p:cSld>
+  <p:clrMapOvr>
+    <a:masterClrMapping/>
+  </p:clrMapOvr>
+</p:sld>
+</file>
+
+<file path=ppt/slides/slide16.xml><?xml version="1.0" encoding="utf-8"?>
+<p:sld xmlns:a="http://schemas.openxmlformats.org/drawingml/2006/main" xmlns:p="http://schemas.openxmlformats.org/presentationml/2006/main" xmlns:r="http://schemas.openxmlformats.org/officeDocument/2006/relationships">
+  <p:cSld>
+    <p:spTree>
+      <p:nvGrpSpPr>
+        <p:cNvPr id="1" name=""/>
+        <p:cNvGrpSpPr/>
+        <p:nvPr/>
+      </p:nvGrpSpPr>
+      <p:grpSpPr/>
+      <p:sp>
+        <p:nvSpPr>
+          <p:cNvPr id="2" name="TextBox 1"/>
+          <p:cNvSpPr txBox="1"/>
+          <p:nvPr/>
+        </p:nvSpPr>
+        <p:spPr>
+          <a:xfrm>
+            <a:off x="457200" y="274320"/>
+            <a:ext cx="8229600" cy="640080"/>
+          </a:xfrm>
+          <a:prstGeom prst="rect">
+            <a:avLst/>
+          </a:prstGeom>
+          <a:noFill/>
+        </p:spPr>
+        <p:txBody>
+          <a:bodyPr wrap="square">
+            <a:spAutoFit/>
+          </a:bodyPr>
+          <a:lstStyle/>
+          <a:p>
+            <a:r>
+              <a:rPr sz="2200" b="1">
+                <a:solidFill>
+                  <a:srgbClr val="0B3D2E"/>
+                </a:solidFill>
+              </a:rPr>
+              <a:t>Diagrama de la clase</a:t>
+            </a:r>
+          </a:p>
+        </p:txBody>
+      </p:sp>
+      <p:pic>
+        <p:nvPicPr>
+          <p:cNvPr id="3" name="Picture 2" descr="554dc9705b00b4b4.png"/>
+          <p:cNvPicPr>
+            <a:picLocks noChangeAspect="1"/>
+          </p:cNvPicPr>
+          <p:nvPr/>
+        </p:nvPicPr>
+        <p:blipFill>
+          <a:blip r:embed="rId2"/>
+          <a:stretch>
+            <a:fillRect/>
+          </a:stretch>
+        </p:blipFill>
+        <p:spPr>
+          <a:xfrm>
+            <a:off x="457200" y="3387852"/>
+            <a:ext cx="8229600" cy="722376"/>
+          </a:xfrm>
+          <a:prstGeom prst="rect">
+            <a:avLst/>
+          </a:prstGeom>
+        </p:spPr>
+      </p:pic>
     </p:spTree>
   </p:cSld>
   <p:clrMapOvr>
@@ -3922,7 +4508,7 @@
                   <a:srgbClr val="22282E"/>
                 </a:solidFill>
               </a:rPr>
-              <a:t>•  Documentar hallazgos con cadena de custodia y control de sesgos.</a:t>
+              <a:t>•  Documentar hallazgos con procedencia, transformaciones y control de sesgos; reconocer cuándo un proceso formal exige cadena de custodia adicional.</a:t>
             </a:r>
           </a:p>
         </p:txBody>
@@ -4152,7 +4738,7 @@
                   <a:srgbClr val="0B3D2E"/>
                 </a:solidFill>
               </a:rPr>
-              <a:t>📖 Definiciones y características</a:t>
+              <a:t>🧠 Explicación en profundidad</a:t>
             </a:r>
           </a:p>
         </p:txBody>
@@ -4190,97 +4776,97 @@
                   <a:srgbClr val="22282E"/>
                 </a:solidFill>
               </a:rPr>
-              <a:t>•  OSINT (Open Source Intelligence): inteligencia derivada de información pública y de acceso</a:t>
-            </a:r>
-          </a:p>
-          <a:p>
-            <a:pPr>
-              <a:spcAft>
-                <a:spcPts val="600"/>
-              </a:spcAft>
-            </a:pPr>
-            <a:r>
-              <a:rPr sz="1500">
-                <a:solidFill>
-                  <a:srgbClr val="22282E"/>
-                </a:solidFill>
-              </a:rPr>
-              <a:t>•  legal. Característica clave: la fuente es abierta, pero el valor está en la correlación, no en el dato aislado.</a:t>
-            </a:r>
-          </a:p>
-          <a:p>
-            <a:pPr>
-              <a:spcAft>
-                <a:spcPts val="600"/>
-              </a:spcAft>
-            </a:pPr>
-            <a:r>
-              <a:rPr sz="1500">
-                <a:solidFill>
-                  <a:srgbClr val="22282E"/>
-                </a:solidFill>
-              </a:rPr>
-              <a:t>•  Ciclo de inteligencia: proceso iterativo de dirección → recolección → procesamiento → análisis → difusión. Característica: es cíclico; el análisis genera nuevas preguntas.</a:t>
-            </a:r>
-          </a:p>
-          <a:p>
-            <a:pPr>
-              <a:spcAft>
-                <a:spcPts val="600"/>
-              </a:spcAft>
-            </a:pPr>
-            <a:r>
-              <a:rPr sz="1500">
-                <a:solidFill>
-                  <a:srgbClr val="22282E"/>
-                </a:solidFill>
-              </a:rPr>
-              <a:t>•  OSINT pasivo: recolección que no interactúa con la infraestructura del objetivo (cachés, buscadores, archivos). Característica: casi indetectable.</a:t>
-            </a:r>
-          </a:p>
-          <a:p>
-            <a:pPr>
-              <a:spcAft>
-                <a:spcPts val="600"/>
-              </a:spcAft>
-            </a:pPr>
-            <a:r>
-              <a:rPr sz="1500">
-                <a:solidFill>
-                  <a:srgbClr val="22282E"/>
-                </a:solidFill>
-              </a:rPr>
-              <a:t>•  OSINT activo: implica tocar sistemas del objetivo (visitar su web, resolver su DNS). Característica: deja rastros en logs.</a:t>
-            </a:r>
-          </a:p>
-          <a:p>
-            <a:pPr>
-              <a:spcAft>
-                <a:spcPts val="600"/>
-              </a:spcAft>
-            </a:pPr>
-            <a:r>
-              <a:rPr sz="1500">
-                <a:solidFill>
-                  <a:srgbClr val="22282E"/>
-                </a:solidFill>
-              </a:rPr>
-              <a:t>•  Sock puppet: identidad ficticia y creíble usada para investigar sin exponer al analista. Característica: debe tener historia y coherencia.</a:t>
-            </a:r>
-          </a:p>
-          <a:p>
-            <a:pPr>
-              <a:spcAft>
-                <a:spcPts val="600"/>
-              </a:spcAft>
-            </a:pPr>
-            <a:r>
-              <a:rPr sz="1500">
-                <a:solidFill>
-                  <a:srgbClr val="22282E"/>
-                </a:solidFill>
-              </a:rPr>
-              <a:t>•  Cadena de custodia: registro de cómo, cuándo y de dónde se obtuvo cada evidencia. Característica: sin ella, el hallazgo no es defendible.</a:t>
+              <a:t>•  Una fuente abierta es información obtenible legalmente sin acceso clandestino; eso no significa que carezca de restricciones, riesgo o datos personales. OSINT aparece cuando esa información se…</a:t>
+            </a:r>
+          </a:p>
+          <a:p>
+            <a:pPr>
+              <a:spcAft>
+                <a:spcPts val="600"/>
+              </a:spcAft>
+            </a:pPr>
+            <a:r>
+              <a:rPr sz="1500">
+                <a:solidFill>
+                  <a:srgbClr val="22282E"/>
+                </a:solidFill>
+              </a:rPr>
+              <a:t>•  El gráfico comienza por la decisión que el análisis debe apoyar. Sin ella, el investigador acumula datos interesantes pero irrelevantes. El plan define indicadores buscables, fuentes probables…</a:t>
+            </a:r>
+          </a:p>
+          <a:p>
+            <a:pPr>
+              <a:spcAft>
+                <a:spcPts val="600"/>
+              </a:spcAft>
+            </a:pPr>
+            <a:r>
+              <a:rPr sz="1500">
+                <a:solidFill>
+                  <a:srgbClr val="22282E"/>
+                </a:solidFill>
+              </a:rPr>
+              <a:t>•  «El certificado observado contiene este dominio» es una observación. «El dominio pertenece a la misma organización» es una inferencia que necesita contexto; puede tratarse de un proveedor o activo…</a:t>
+            </a:r>
+          </a:p>
+          <a:p>
+            <a:pPr>
+              <a:spcAft>
+                <a:spcPts val="600"/>
+              </a:spcAft>
+            </a:pPr>
+            <a:r>
+              <a:rPr sz="1500">
+                <a:solidFill>
+                  <a:srgbClr val="22282E"/>
+                </a:solidFill>
+              </a:rPr>
+              <a:t>•  La corroboración debe buscar independencia. Diez sitios que copian la misma publicación constituyen una sola raíz informativa. Una fuente primaria puede ser directa pero interesada; una secundaria…</a:t>
+            </a:r>
+          </a:p>
+          <a:p>
+            <a:pPr>
+              <a:spcAft>
+                <a:spcPts val="600"/>
+              </a:spcAft>
+            </a:pPr>
+            <a:r>
+              <a:rPr sz="1500">
+                <a:solidFill>
+                  <a:srgbClr val="22282E"/>
+                </a:solidFill>
+              </a:rPr>
+              <a:t>•  El Berkeley Protocol ofrece un referente metodológico para recopilar, analizar y preservar información digital de manera profesional, además de considerar seguridad física, digital y psicosocial. Su…</a:t>
+            </a:r>
+          </a:p>
+          <a:p>
+            <a:pPr>
+              <a:spcAft>
+                <a:spcPts val="600"/>
+              </a:spcAft>
+            </a:pPr>
+            <a:r>
+              <a:rPr sz="1500">
+                <a:solidFill>
+                  <a:srgbClr val="22282E"/>
+                </a:solidFill>
+              </a:rPr>
+              <a:t>•  Recopilar solo lo necesario reduce daño y sesgo. Datos públicos pueden seguir siendo sensibles. No se contacta a personas, no se eluden controles, no se publica información identificable y no se…</a:t>
+            </a:r>
+          </a:p>
+          <a:p>
+            <a:pPr>
+              <a:spcAft>
+                <a:spcPts val="600"/>
+              </a:spcAft>
+            </a:pPr>
+            <a:r>
+              <a:rPr sz="1500">
+                <a:solidFill>
+                  <a:srgbClr val="22282E"/>
+                </a:solidFill>
+              </a:rPr>
+              <a:t>•  Cinco artículos afirman que una empresa cerrará una planta. Todos enlazan un mismo mensaje anónimo. El investigador no cuenta cinco corroboraciones; registra una raíz con cinco republicaciones, busca…</a:t>
             </a:r>
           </a:p>
         </p:txBody>
@@ -4331,7 +4917,7 @@
                   <a:srgbClr val="0B3D2E"/>
                 </a:solidFill>
               </a:rPr>
-              <a:t>🧰 Herramientas y preparación</a:t>
+              <a:t>📔 Glosario operativo</a:t>
             </a:r>
           </a:p>
         </p:txBody>
@@ -4369,67 +4955,82 @@
                   <a:srgbClr val="22282E"/>
                 </a:solidFill>
               </a:rPr>
-              <a:t>•  Máquina de investigación aislada: VM (VirtualBox/VMware) con snapshot limpio, o la Trace Labs OSINT VM / Kali. Nunca investigues desde tu equipo y cuenta personales.</a:t>
-            </a:r>
-          </a:p>
-          <a:p>
-            <a:pPr>
-              <a:spcAft>
-                <a:spcPts val="600"/>
-              </a:spcAft>
-            </a:pPr>
-            <a:r>
-              <a:rPr sz="1500">
-                <a:solidFill>
-                  <a:srgbClr val="22282E"/>
-                </a:solidFill>
-              </a:rPr>
-              <a:t>•  Navegador endurecido: Firefox con contenedores (Multi-Account Containers), sin sesión personal; opcionalmente detrás de VPN/Tor según el alcance.</a:t>
-            </a:r>
-          </a:p>
-          <a:p>
-            <a:pPr>
-              <a:spcAft>
-                <a:spcPts val="600"/>
-              </a:spcAft>
-            </a:pPr>
-            <a:r>
-              <a:rPr sz="1500">
-                <a:solidFill>
-                  <a:srgbClr val="22282E"/>
-                </a:solidFill>
-              </a:rPr>
-              <a:t>•  Gestor de casos: herramienta para notas y capturas: Obsidian, CherryTree o una plantilla Markdown; captura con Hunchly si es un engagement formal.</a:t>
-            </a:r>
-          </a:p>
-          <a:p>
-            <a:pPr>
-              <a:spcAft>
-                <a:spcPts val="600"/>
-              </a:spcAft>
-            </a:pPr>
-            <a:r>
-              <a:rPr sz="1500">
-                <a:solidFill>
-                  <a:srgbClr val="22282E"/>
-                </a:solidFill>
-              </a:rPr>
-              <a:t>•  OSINT Framework (osintframework.com) como índice de fuentes por categoría.</a:t>
-            </a:r>
-          </a:p>
-          <a:p>
-            <a:pPr>
-              <a:spcAft>
-                <a:spcPts val="600"/>
-              </a:spcAft>
-            </a:pPr>
-            <a:r>
-              <a:rPr sz="1500">
-                <a:solidFill>
-                  <a:srgbClr val="22282E"/>
-                </a:solidFill>
-              </a:rPr>
-              <a:t>•  Recordatorio: todo se hace en entorno propio/aislado y sobre objetivos autorizados o públicos legítimos.</a:t>
+              <a:t>•  Término — Definición útil</a:t>
+            </a:r>
+          </a:p>
+          <a:p>
+            <a:pPr>
+              <a:spcAft>
+                <a:spcPts val="600"/>
+              </a:spcAft>
+            </a:pPr>
+            <a:r>
+              <a:rPr sz="1500">
+                <a:solidFill>
+                  <a:srgbClr val="22282E"/>
+                </a:solidFill>
+              </a:rPr>
+              <a:t>•  Requisito de inteligencia — Pregunta ligada a una decisión y a un alcance.</a:t>
+            </a:r>
+          </a:p>
+          <a:p>
+            <a:pPr>
+              <a:spcAft>
+                <a:spcPts val="600"/>
+              </a:spcAft>
+            </a:pPr>
+            <a:r>
+              <a:rPr sz="1500">
+                <a:solidFill>
+                  <a:srgbClr val="22282E"/>
+                </a:solidFill>
+              </a:rPr>
+              <a:t>•  Fuente primaria — Material cercano al hecho; no garantiza neutralidad ni autenticidad.</a:t>
+            </a:r>
+          </a:p>
+          <a:p>
+            <a:pPr>
+              <a:spcAft>
+                <a:spcPts val="600"/>
+              </a:spcAft>
+            </a:pPr>
+            <a:r>
+              <a:rPr sz="1500">
+                <a:solidFill>
+                  <a:srgbClr val="22282E"/>
+                </a:solidFill>
+              </a:rPr>
+              <a:t>•  Corroboración — Apoyo mediante evidencia con origen suficientemente independiente.</a:t>
+            </a:r>
+          </a:p>
+          <a:p>
+            <a:pPr>
+              <a:spcAft>
+                <a:spcPts val="600"/>
+              </a:spcAft>
+            </a:pPr>
+            <a:r>
+              <a:rPr sz="1500">
+                <a:solidFill>
+                  <a:srgbClr val="22282E"/>
+                </a:solidFill>
+              </a:rPr>
+              <a:t>•  Procedencia — Registro del origen y transformaciones de un elemento.</a:t>
+            </a:r>
+          </a:p>
+          <a:p>
+            <a:pPr>
+              <a:spcAft>
+                <a:spcPts val="600"/>
+              </a:spcAft>
+            </a:pPr>
+            <a:r>
+              <a:rPr sz="1500">
+                <a:solidFill>
+                  <a:srgbClr val="22282E"/>
+                </a:solidFill>
+              </a:rPr>
+              <a:t>•  Confianza analítica — Juicio explicado sobre la solidez de una conclusión.</a:t>
             </a:r>
           </a:p>
         </p:txBody>
@@ -4480,7 +5081,7 @@
                   <a:srgbClr val="0B3D2E"/>
                 </a:solidFill>
               </a:rPr>
-              <a:t>🧪 Laboratorio guiado</a:t>
+              <a:t>✅ Criterio de dominio</a:t>
             </a:r>
           </a:p>
         </p:txBody>
@@ -4518,97 +5119,7 @@
                   <a:srgbClr val="22282E"/>
                 </a:solidFill>
               </a:rPr>
-              <a:t>•  Ejercicio aplicado y autorizado: OSINT sobre ti mismo (autoevaluación de huella).</a:t>
-            </a:r>
-          </a:p>
-          <a:p>
-            <a:pPr>
-              <a:spcAft>
-                <a:spcPts val="600"/>
-              </a:spcAft>
-            </a:pPr>
-            <a:r>
-              <a:rPr sz="1500">
-                <a:solidFill>
-                  <a:srgbClr val="22282E"/>
-                </a:solidFill>
-              </a:rPr>
-              <a:t>•  Crea un snapshot limpio de tu VM de investigación y anota fecha/hora de inicio del caso.</a:t>
-            </a:r>
-          </a:p>
-          <a:p>
-            <a:pPr>
-              <a:spcAft>
-                <a:spcPts val="600"/>
-              </a:spcAft>
-            </a:pPr>
-            <a:r>
-              <a:rPr sz="1500">
-                <a:solidFill>
-                  <a:srgbClr val="22282E"/>
-                </a:solidFill>
-              </a:rPr>
-              <a:t>•  Define la dirección: escribe la pregunta de inteligencia (ej.: "¿qué datos míos son públicos y podrían usarse en un pretexto contra mí?").</a:t>
-            </a:r>
-          </a:p>
-          <a:p>
-            <a:pPr>
-              <a:spcAft>
-                <a:spcPts val="600"/>
-              </a:spcAft>
-            </a:pPr>
-            <a:r>
-              <a:rPr sz="1500">
-                <a:solidFill>
-                  <a:srgbClr val="22282E"/>
-                </a:solidFill>
-              </a:rPr>
-              <a:t>•  Recolección pasiva: busca tu nombre entre comillas en varios buscadores (Google, Bing, DuckDuckGo) y en https://www.google.com/search?q="Tu Nombre". Registra cada URL y captura.</a:t>
-            </a:r>
-          </a:p>
-          <a:p>
-            <a:pPr>
-              <a:spcAft>
-                <a:spcPts val="600"/>
-              </a:spcAft>
-            </a:pPr>
-            <a:r>
-              <a:rPr sz="1500">
-                <a:solidFill>
-                  <a:srgbClr val="22282E"/>
-                </a:solidFill>
-              </a:rPr>
-              <a:t>•  Consulta motores especializados: https://haveibeenpwned.com/ para brechas asociadas a tu correo.</a:t>
-            </a:r>
-          </a:p>
-          <a:p>
-            <a:pPr>
-              <a:spcAft>
-                <a:spcPts val="600"/>
-              </a:spcAft>
-            </a:pPr>
-            <a:r>
-              <a:rPr sz="1500">
-                <a:solidFill>
-                  <a:srgbClr val="22282E"/>
-                </a:solidFill>
-              </a:rPr>
-              <a:t>•  Revisa metadatos de una foto tuya pública con exiftool foto.jpg y anota qué revela.</a:t>
-            </a:r>
-          </a:p>
-          <a:p>
-            <a:pPr>
-              <a:spcAft>
-                <a:spcPts val="600"/>
-              </a:spcAft>
-            </a:pPr>
-            <a:r>
-              <a:rPr sz="1500">
-                <a:solidFill>
-                  <a:srgbClr val="22282E"/>
-                </a:solidFill>
-              </a:rPr>
-              <a:t>•  Procesamiento: vuelca los datos en una tabla (dato, fuente, fecha, confianza alta/media/baja).</a:t>
+              <a:t>•  El alumno domina la clase cuando convierte una necesidad en pregunta y plan, preserva procedencia, distingue observación de inferencia, detecta fuentes dependientes y redacta una conclusión con…</a:t>
             </a:r>
           </a:p>
         </p:txBody>
@@ -4659,7 +5170,7 @@
                   <a:srgbClr val="0B3D2E"/>
                 </a:solidFill>
               </a:rPr>
-              <a:t>✍️ Ejercicios</a:t>
+              <a:t>📖 Definiciones y características</a:t>
             </a:r>
           </a:p>
         </p:txBody>
@@ -4697,82 +5208,97 @@
                   <a:srgbClr val="22282E"/>
                 </a:solidFill>
               </a:rPr>
-              <a:t>•  Clasifica 10 fuentes de datos como pasivas o activas y justifica cada una.</a:t>
-            </a:r>
-          </a:p>
-          <a:p>
-            <a:pPr>
-              <a:spcAft>
-                <a:spcPts val="600"/>
-              </a:spcAft>
-            </a:pPr>
-            <a:r>
-              <a:rPr sz="1500">
-                <a:solidFill>
-                  <a:srgbClr val="22282E"/>
-                </a:solidFill>
-              </a:rPr>
-              <a:t>•  Dibuja el ciclo de inteligencia y describe qué ocurre si se salta la fase de "dirección".</a:t>
-            </a:r>
-          </a:p>
-          <a:p>
-            <a:pPr>
-              <a:spcAft>
-                <a:spcPts val="600"/>
-              </a:spcAft>
-            </a:pPr>
-            <a:r>
-              <a:rPr sz="1500">
-                <a:solidFill>
-                  <a:srgbClr val="22282E"/>
-                </a:solidFill>
-              </a:rPr>
-              <a:t>•  Crea un sock puppet coherente (nombre, correo dedicado, foto generada) y documenta su historia sin usarlo aún.</a:t>
-            </a:r>
-          </a:p>
-          <a:p>
-            <a:pPr>
-              <a:spcAft>
-                <a:spcPts val="600"/>
-              </a:spcAft>
-            </a:pPr>
-            <a:r>
-              <a:rPr sz="1500">
-                <a:solidFill>
-                  <a:srgbClr val="22282E"/>
-                </a:solidFill>
-              </a:rPr>
-              <a:t>•  Redacta una hipótesis y luego lista 3 datos que la refutarían, para combatir el sesgo de confirmación.</a:t>
-            </a:r>
-          </a:p>
-          <a:p>
-            <a:pPr>
-              <a:spcAft>
-                <a:spcPts val="600"/>
-              </a:spcAft>
-            </a:pPr>
-            <a:r>
-              <a:rPr sz="1500">
-                <a:solidFill>
-                  <a:srgbClr val="22282E"/>
-                </a:solidFill>
-              </a:rPr>
-              <a:t>•  Diseña la plantilla de tabla de hallazgos con columnas de confianza y verificación cruzada.</a:t>
-            </a:r>
-          </a:p>
-          <a:p>
-            <a:pPr>
-              <a:spcAft>
-                <a:spcPts val="600"/>
-              </a:spcAft>
-            </a:pPr>
-            <a:r>
-              <a:rPr sz="1500">
-                <a:solidFill>
-                  <a:srgbClr val="22282E"/>
-                </a:solidFill>
-              </a:rPr>
-              <a:t>•  Investiga la diferencia entre OSINT y "doxing" y explica dónde está la frontera legal/ética.</a:t>
+              <a:t>•  OSINT (Open Source Intelligence): inteligencia derivada de información pública y de acceso</a:t>
+            </a:r>
+          </a:p>
+          <a:p>
+            <a:pPr>
+              <a:spcAft>
+                <a:spcPts val="600"/>
+              </a:spcAft>
+            </a:pPr>
+            <a:r>
+              <a:rPr sz="1500">
+                <a:solidFill>
+                  <a:srgbClr val="22282E"/>
+                </a:solidFill>
+              </a:rPr>
+              <a:t>•  legal. Característica clave: la fuente es abierta, pero el valor está en la correlación, no en el dato aislado.</a:t>
+            </a:r>
+          </a:p>
+          <a:p>
+            <a:pPr>
+              <a:spcAft>
+                <a:spcPts val="600"/>
+              </a:spcAft>
+            </a:pPr>
+            <a:r>
+              <a:rPr sz="1500">
+                <a:solidFill>
+                  <a:srgbClr val="22282E"/>
+                </a:solidFill>
+              </a:rPr>
+              <a:t>•  Ciclo de inteligencia: proceso iterativo de dirección → recolección → procesamiento → análisis → difusión. Característica: es cíclico; el análisis genera nuevas preguntas.</a:t>
+            </a:r>
+          </a:p>
+          <a:p>
+            <a:pPr>
+              <a:spcAft>
+                <a:spcPts val="600"/>
+              </a:spcAft>
+            </a:pPr>
+            <a:r>
+              <a:rPr sz="1500">
+                <a:solidFill>
+                  <a:srgbClr val="22282E"/>
+                </a:solidFill>
+              </a:rPr>
+              <a:t>•  OSINT pasivo: recolección que no interactúa directamente con la infraestructura del objetivo (cachés, buscadores, archivos). Característica: reduce contacto directo, pero proveedores y fuentes aún…</a:t>
+            </a:r>
+          </a:p>
+          <a:p>
+            <a:pPr>
+              <a:spcAft>
+                <a:spcPts val="600"/>
+              </a:spcAft>
+            </a:pPr>
+            <a:r>
+              <a:rPr sz="1500">
+                <a:solidFill>
+                  <a:srgbClr val="22282E"/>
+                </a:solidFill>
+              </a:rPr>
+              <a:t>•  OSINT activo: implica tocar sistemas del objetivo (visitar su web, resolver su DNS). Característica: deja rastros en logs.</a:t>
+            </a:r>
+          </a:p>
+          <a:p>
+            <a:pPr>
+              <a:spcAft>
+                <a:spcPts val="600"/>
+              </a:spcAft>
+            </a:pPr>
+            <a:r>
+              <a:rPr sz="1500">
+                <a:solidFill>
+                  <a:srgbClr val="22282E"/>
+                </a:solidFill>
+              </a:rPr>
+              <a:t>•  Identidad de investigación: perfil separado que algunas investigaciones autorizadas usan para reducir exposición. Característica: su creación y uso requieren aprobación, necesidad y reglas de…</a:t>
+            </a:r>
+          </a:p>
+          <a:p>
+            <a:pPr>
+              <a:spcAft>
+                <a:spcPts val="600"/>
+              </a:spcAft>
+            </a:pPr>
+            <a:r>
+              <a:rPr sz="1500">
+                <a:solidFill>
+                  <a:srgbClr val="22282E"/>
+                </a:solidFill>
+              </a:rPr>
+              <a:t>•  Procedencia: registro de cómo, cuándo y de dónde se obtuvo información y qué transformaciones recibió. Característica: permite auditar el análisis; una cadena de custodia formal añade requisitos…</a:t>
             </a:r>
           </a:p>
         </p:txBody>
@@ -4823,7 +5349,7 @@
                   <a:srgbClr val="0B3D2E"/>
                 </a:solidFill>
               </a:rPr>
-              <a:t>📝 Reto verificable</a:t>
+              <a:t>🧰 Herramientas y preparación</a:t>
             </a:r>
           </a:p>
         </p:txBody>
@@ -4861,67 +5387,67 @@
                   <a:srgbClr val="22282E"/>
                 </a:solidFill>
               </a:rPr>
-              <a:t>•  Produce un informe OSINT de tu propia huella (máx. 2 páginas) que incluya: pregunta de</a:t>
-            </a:r>
-          </a:p>
-          <a:p>
-            <a:pPr>
-              <a:spcAft>
-                <a:spcPts val="600"/>
-              </a:spcAft>
-            </a:pPr>
-            <a:r>
-              <a:rPr sz="1500">
-                <a:solidFill>
-                  <a:srgbClr val="22282E"/>
-                </a:solidFill>
-              </a:rPr>
-              <a:t>•  inteligencia, al menos 8 hallazgos con fuente y nivel de confianza, un diagrama de correlación y 5</a:t>
-            </a:r>
-          </a:p>
-          <a:p>
-            <a:pPr>
-              <a:spcAft>
-                <a:spcPts val="600"/>
-              </a:spcAft>
-            </a:pPr>
-            <a:r>
-              <a:rPr sz="1500">
-                <a:solidFill>
-                  <a:srgbClr val="22282E"/>
-                </a:solidFill>
-              </a:rPr>
-              <a:t>•  recomendaciones concretas de reducción de exposición.</a:t>
-            </a:r>
-          </a:p>
-          <a:p>
-            <a:pPr>
-              <a:spcAft>
-                <a:spcPts val="600"/>
-              </a:spcAft>
-            </a:pPr>
-            <a:r>
-              <a:rPr sz="1500">
-                <a:solidFill>
-                  <a:srgbClr val="22282E"/>
-                </a:solidFill>
-              </a:rPr>
-              <a:t>•  Criterio de aceptación: cada hallazgo es reproducible por un tercero siguiendo la fuente citada,</a:t>
-            </a:r>
-          </a:p>
-          <a:p>
-            <a:pPr>
-              <a:spcAft>
-                <a:spcPts val="600"/>
-              </a:spcAft>
-            </a:pPr>
-            <a:r>
-              <a:rPr sz="1500">
-                <a:solidFill>
-                  <a:srgbClr val="22282E"/>
-                </a:solidFill>
-              </a:rPr>
-              <a:t>•  y el informe distingue explícitamente hechos verificados de inferencias.</a:t>
+              <a:t>•  Máquina de investigación aislada: VM (VirtualBox/VMware) con snapshot limpio, o la Trace Labs OSINT VM / Kali, cuando el modelo de amenaza justifique separar el entorno de las cuentas cotidianas.</a:t>
+            </a:r>
+          </a:p>
+          <a:p>
+            <a:pPr>
+              <a:spcAft>
+                <a:spcPts val="600"/>
+              </a:spcAft>
+            </a:pPr>
+            <a:r>
+              <a:rPr sz="1500">
+                <a:solidFill>
+                  <a:srgbClr val="22282E"/>
+                </a:solidFill>
+              </a:rPr>
+              <a:t>•  Navegador endurecido: Firefox con contenedores (Multi-Account Containers), sin sesión personal; opcionalmente detrás de VPN/Tor según el alcance.</a:t>
+            </a:r>
+          </a:p>
+          <a:p>
+            <a:pPr>
+              <a:spcAft>
+                <a:spcPts val="600"/>
+              </a:spcAft>
+            </a:pPr>
+            <a:r>
+              <a:rPr sz="1500">
+                <a:solidFill>
+                  <a:srgbClr val="22282E"/>
+                </a:solidFill>
+              </a:rPr>
+              <a:t>•  Gestor de casos: herramienta para notas y capturas: Obsidian, CherryTree o una plantilla Markdown; captura con Hunchly si es un engagement formal.</a:t>
+            </a:r>
+          </a:p>
+          <a:p>
+            <a:pPr>
+              <a:spcAft>
+                <a:spcPts val="600"/>
+              </a:spcAft>
+            </a:pPr>
+            <a:r>
+              <a:rPr sz="1500">
+                <a:solidFill>
+                  <a:srgbClr val="22282E"/>
+                </a:solidFill>
+              </a:rPr>
+              <a:t>•  OSINT Framework (osintframework.com) como índice de fuentes por categoría.</a:t>
+            </a:r>
+          </a:p>
+          <a:p>
+            <a:pPr>
+              <a:spcAft>
+                <a:spcPts val="600"/>
+              </a:spcAft>
+            </a:pPr>
+            <a:r>
+              <a:rPr sz="1500">
+                <a:solidFill>
+                  <a:srgbClr val="22282E"/>
+                </a:solidFill>
+              </a:rPr>
+              <a:t>•  Recordatorio: todo se hace en entorno propio/aislado y sobre objetivos autorizados o públicos legítimos.</a:t>
             </a:r>
           </a:p>
         </p:txBody>
